--- a/Review2_Presentation.pptx
+++ b/Review2_Presentation.pptx
@@ -6972,7 +6972,7 @@
                 <a:ea typeface="Cambria" pitchFamily="34" charset="-122"/>
                 <a:cs typeface="Cambria" pitchFamily="34" charset="-120"/>
               </a:rPr>
-              <a:t>Limitations</a:t>
+              <a:t>Market Relevance, Unexpected Results and Review 3 Plan</a:t>
             </a:r>
             <a:endParaRPr lang="en-US" sz="2200" dirty="0"/>
           </a:p>
@@ -6986,8 +6986,8 @@
         </p:nvSpPr>
         <p:spPr>
           <a:xfrm>
-            <a:off x="411480" y="1005840"/>
-            <a:ext cx="8321040" cy="3840480"/>
+            <a:off x="411480" y="658368"/>
+            <a:ext cx="8321040" cy="274320"/>
           </a:xfrm>
           <a:prstGeom prst="rect">
             <a:avLst/>
@@ -6996,199 +6996,711 @@
           <a:ln/>
         </p:spPr>
         <p:txBody>
+          <a:bodyPr wrap="square" lIns="0" tIns="0" rIns="0" bIns="0" rtlCol="0" anchor="ctr"/>
+          <a:lstStyle/>
+          <a:p>
+            <a:pPr marL="0" indent="0">
+              <a:buNone/>
+            </a:pPr>
+            <a:r>
+              <a:rPr lang="en-US" sz="1100" dirty="0">
+                <a:solidFill>
+                  <a:srgbClr val="666666"/>
+                </a:solidFill>
+                <a:latin typeface="Calibri" pitchFamily="34" charset="0"/>
+                <a:ea typeface="Calibri" pitchFamily="34" charset="-122"/>
+                <a:cs typeface="Calibri" pitchFamily="34" charset="-120"/>
+              </a:rPr>
+              <a:t>How the findings compare with 2026 industry trends, what we did not expect, and what comes next</a:t>
+            </a:r>
+            <a:endParaRPr lang="en-US" sz="1100" dirty="0"/>
+          </a:p>
+        </p:txBody>
+      </p:sp>
+      <p:sp>
+        <p:nvSpPr>
+          <p:cNvPr id="4" name="Text 2"/>
+          <p:cNvSpPr txBox="1"/>
+          <p:nvPr/>
+        </p:nvSpPr>
+        <p:spPr>
+          <a:xfrm>
+            <a:off x="411480" y="1051560"/>
+            <a:ext cx="2651760" cy="274320"/>
+          </a:xfrm>
+          <a:prstGeom prst="rect">
+            <a:avLst/>
+          </a:prstGeom>
+          <a:noFill/>
+          <a:ln/>
+        </p:spPr>
+        <p:txBody>
+          <a:bodyPr wrap="square" lIns="0" tIns="0" rIns="0" bIns="0" rtlCol="0" anchor="ctr"/>
+          <a:lstStyle/>
+          <a:p>
+            <a:pPr marL="0" indent="0">
+              <a:buNone/>
+            </a:pPr>
+            <a:r>
+              <a:rPr lang="en-US" sz="1300" b="1" dirty="0">
+                <a:solidFill>
+                  <a:srgbClr val="000000"/>
+                </a:solidFill>
+                <a:latin typeface="Calibri" pitchFamily="34" charset="0"/>
+                <a:ea typeface="Calibri" pitchFamily="34" charset="-122"/>
+                <a:cs typeface="Calibri" pitchFamily="34" charset="-120"/>
+              </a:rPr>
+              <a:t>Results vs. market trends</a:t>
+            </a:r>
+            <a:endParaRPr lang="en-US" sz="1300" dirty="0"/>
+          </a:p>
+        </p:txBody>
+      </p:sp>
+      <p:sp>
+        <p:nvSpPr>
+          <p:cNvPr id="5" name="Text 3"/>
+          <p:cNvSpPr txBox="1"/>
+          <p:nvPr/>
+        </p:nvSpPr>
+        <p:spPr>
+          <a:xfrm>
+            <a:off x="411480" y="1371600"/>
+            <a:ext cx="2651760" cy="3154680"/>
+          </a:xfrm>
+          <a:prstGeom prst="rect">
+            <a:avLst/>
+          </a:prstGeom>
+          <a:noFill/>
+          <a:ln/>
+        </p:spPr>
+        <p:txBody>
           <a:bodyPr wrap="square" lIns="0" tIns="0" rIns="0" bIns="0" rtlCol="0" anchor="t"/>
           <a:lstStyle/>
           <a:p>
             <a:pPr marL="139700" indent="-139700">
               <a:spcAft>
-                <a:spcPts val="1600"/>
+                <a:spcPts val="500"/>
               </a:spcAft>
               <a:buSzPct val="100000"/>
               <a:buChar char="•"/>
             </a:pPr>
             <a:r>
-              <a:rPr lang="en-US" sz="1600" b="1" dirty="0">
-                <a:solidFill>
-                  <a:srgbClr val="333333"/>
-                </a:solidFill>
-                <a:latin typeface="Calibri" pitchFamily="34" charset="0"/>
-                <a:ea typeface="Calibri" pitchFamily="34" charset="-122"/>
-                <a:cs typeface="Calibri" pitchFamily="34" charset="-120"/>
-              </a:rPr>
-              <a:t>Data: </a:t>
-            </a:r>
-            <a:r>
-              <a:rPr lang="en-US" sz="1600" dirty="0">
-                <a:solidFill>
-                  <a:srgbClr val="333333"/>
-                </a:solidFill>
-                <a:latin typeface="Calibri" pitchFamily="34" charset="0"/>
-                <a:ea typeface="Calibri" pitchFamily="34" charset="-122"/>
-                <a:cs typeface="Calibri" pitchFamily="34" charset="-120"/>
-              </a:rPr>
-              <a:t>76.7% of cells (90 of 105 SCR values) are simulated → results are exploratory and illustrative</a:t>
-            </a:r>
-            <a:endParaRPr lang="en-US" sz="1600" dirty="0"/>
+              <a:rPr lang="en-US" sz="1050" b="1" dirty="0">
+                <a:solidFill>
+                  <a:srgbClr val="333333"/>
+                </a:solidFill>
+                <a:latin typeface="Calibri" pitchFamily="34" charset="0"/>
+                <a:ea typeface="Calibri" pitchFamily="34" charset="-122"/>
+                <a:cs typeface="Calibri" pitchFamily="34" charset="-120"/>
+              </a:rPr>
+              <a:t>Collaboration – matches: </a:t>
+            </a:r>
+            <a:r>
+              <a:rPr lang="en-US" sz="1050" dirty="0">
+                <a:solidFill>
+                  <a:srgbClr val="333333"/>
+                </a:solidFill>
+                <a:latin typeface="Calibri" pitchFamily="34" charset="0"/>
+                <a:ea typeface="Calibri" pitchFamily="34" charset="-122"/>
+                <a:cs typeface="Calibri" pitchFamily="34" charset="-120"/>
+              </a:rPr>
+              <a:t>the 2026 memory shortage is being settled through multi-year customer–supplier agreements (Samsung: deals of 5+ years for 60–70% of capacity; Micron: 16 strategic agreements), in line with SUPCOLL as the core condition</a:t>
+            </a:r>
+            <a:endParaRPr lang="en-US" sz="1050" dirty="0"/>
           </a:p>
           <a:p>
             <a:pPr marL="139700" indent="-139700">
               <a:spcAft>
-                <a:spcPts val="1600"/>
+                <a:spcPts val="500"/>
               </a:spcAft>
               <a:buSzPct val="100000"/>
               <a:buChar char="•"/>
             </a:pPr>
             <a:r>
-              <a:rPr lang="en-US" sz="1600" b="1" dirty="0">
-                <a:solidFill>
-                  <a:srgbClr val="333333"/>
-                </a:solidFill>
-                <a:latin typeface="Calibri" pitchFamily="34" charset="0"/>
-                <a:ea typeface="Calibri" pitchFamily="34" charset="-122"/>
-                <a:cs typeface="Calibri" pitchFamily="34" charset="-120"/>
-              </a:rPr>
-              <a:t>Face validity: </a:t>
-            </a:r>
-            <a:r>
-              <a:rPr lang="en-US" sz="1600" dirty="0">
-                <a:solidFill>
-                  <a:srgbClr val="333333"/>
-                </a:solidFill>
-                <a:latin typeface="Calibri" pitchFamily="34" charset="0"/>
-                <a:ea typeface="Calibri" pitchFamily="34" charset="-122"/>
-                <a:cs typeface="Calibri" pitchFamily="34" charset="-120"/>
-              </a:rPr>
-              <a:t>some scores disagree with reported performance (e.g. Intel 2023–25 high SCR despite large losses)</a:t>
-            </a:r>
-            <a:endParaRPr lang="en-US" sz="1600" dirty="0"/>
+              <a:rPr lang="en-US" sz="1050" b="1" dirty="0">
+                <a:solidFill>
+                  <a:srgbClr val="333333"/>
+                </a:solidFill>
+                <a:latin typeface="Calibri" pitchFamily="34" charset="0"/>
+                <a:ea typeface="Calibri" pitchFamily="34" charset="-122"/>
+                <a:cs typeface="Calibri" pitchFamily="34" charset="-120"/>
+              </a:rPr>
+              <a:t>Diversification – partly: </a:t>
+            </a:r>
+            <a:r>
+              <a:rPr lang="en-US" sz="1050" dirty="0">
+                <a:solidFill>
+                  <a:srgbClr val="333333"/>
+                </a:solidFill>
+                <a:latin typeface="Calibri" pitchFamily="34" charset="0"/>
+                <a:ea typeface="Calibri" pitchFamily="34" charset="-122"/>
+                <a:cs typeface="Calibri" pitchFamily="34" charset="-120"/>
+              </a:rPr>
+              <a:t>flexibility is executives’ no. 1 priority and 54% are diversifying geographically; in our results SUPDIV supports resilience but is not core</a:t>
+            </a:r>
+            <a:endParaRPr lang="en-US" sz="1050" dirty="0"/>
           </a:p>
           <a:p>
             <a:pPr marL="139700" indent="-139700">
               <a:spcAft>
-                <a:spcPts val="1600"/>
+                <a:spcPts val="500"/>
               </a:spcAft>
               <a:buSzPct val="100000"/>
               <a:buChar char="•"/>
             </a:pPr>
             <a:r>
-              <a:rPr lang="en-US" sz="1600" b="1" dirty="0">
-                <a:solidFill>
-                  <a:srgbClr val="333333"/>
-                </a:solidFill>
-                <a:latin typeface="Calibri" pitchFamily="34" charset="0"/>
-                <a:ea typeface="Calibri" pitchFamily="34" charset="-122"/>
-                <a:cs typeface="Calibri" pitchFamily="34" charset="-120"/>
-              </a:rPr>
-              <a:t>Firm size: </a:t>
-            </a:r>
-            <a:r>
-              <a:rPr lang="en-US" sz="1600" dirty="0">
-                <a:solidFill>
-                  <a:srgbClr val="333333"/>
-                </a:solidFill>
-                <a:latin typeface="Calibri" pitchFamily="34" charset="0"/>
-                <a:ea typeface="Calibri" pitchFamily="34" charset="-122"/>
-                <a:cs typeface="Calibri" pitchFamily="34" charset="-120"/>
-              </a:rPr>
-              <a:t>scale-based scoring may let large firms score high on all conditions</a:t>
-            </a:r>
-            <a:endParaRPr lang="en-US" sz="1600" dirty="0"/>
+              <a:rPr lang="en-US" sz="1050" b="1" dirty="0">
+                <a:solidFill>
+                  <a:srgbClr val="333333"/>
+                </a:solidFill>
+                <a:latin typeface="Calibri" pitchFamily="34" charset="0"/>
+                <a:ea typeface="Calibri" pitchFamily="34" charset="-122"/>
+                <a:cs typeface="Calibri" pitchFamily="34" charset="-120"/>
+              </a:rPr>
+              <a:t>AI – matches in direction: </a:t>
+            </a:r>
+            <a:r>
+              <a:rPr lang="en-US" sz="1050" dirty="0">
+                <a:solidFill>
+                  <a:srgbClr val="333333"/>
+                </a:solidFill>
+                <a:latin typeface="Calibri" pitchFamily="34" charset="0"/>
+                <a:ea typeface="Calibri" pitchFamily="34" charset="-122"/>
+                <a:cs typeface="Calibri" pitchFamily="34" charset="-120"/>
+              </a:rPr>
+              <a:t>AI spending is rising while poor data quality limits its payoff; our result: AI is not enough alone and appears with AI governance</a:t>
+            </a:r>
+            <a:endParaRPr lang="en-US" sz="1050" dirty="0"/>
           </a:p>
           <a:p>
             <a:pPr marL="139700" indent="-139700">
               <a:spcAft>
-                <a:spcPts val="1600"/>
+                <a:spcPts val="0"/>
               </a:spcAft>
               <a:buSzPct val="100000"/>
               <a:buChar char="•"/>
             </a:pPr>
             <a:r>
-              <a:rPr lang="en-US" sz="1600" b="1" dirty="0">
-                <a:solidFill>
-                  <a:srgbClr val="333333"/>
-                </a:solidFill>
-                <a:latin typeface="Calibri" pitchFamily="34" charset="0"/>
-                <a:ea typeface="Calibri" pitchFamily="34" charset="-122"/>
-                <a:cs typeface="Calibri" pitchFamily="34" charset="-120"/>
-              </a:rPr>
-              <a:t>Calibration: </a:t>
-            </a:r>
-            <a:r>
-              <a:rPr lang="en-US" sz="1600" dirty="0">
-                <a:solidFill>
-                  <a:srgbClr val="333333"/>
-                </a:solidFill>
-                <a:latin typeface="Calibri" pitchFamily="34" charset="0"/>
-                <a:ea typeface="Calibri" pitchFamily="34" charset="-122"/>
-                <a:cs typeface="Calibri" pitchFamily="34" charset="-120"/>
-              </a:rPr>
-              <a:t>percentile anchors depend on the sample; reported alongside theory-based rubric anchors</a:t>
-            </a:r>
-            <a:endParaRPr lang="en-US" sz="1600" dirty="0"/>
-          </a:p>
+              <a:rPr lang="en-US" sz="1050" b="1" dirty="0">
+                <a:solidFill>
+                  <a:srgbClr val="333333"/>
+                </a:solidFill>
+                <a:latin typeface="Calibri" pitchFamily="34" charset="0"/>
+                <a:ea typeface="Calibri" pitchFamily="34" charset="-122"/>
+                <a:cs typeface="Calibri" pitchFamily="34" charset="-120"/>
+              </a:rPr>
+              <a:t>Sustainable sourcing – secondary in both: </a:t>
+            </a:r>
+            <a:r>
+              <a:rPr lang="en-US" sz="1050" dirty="0">
+                <a:solidFill>
+                  <a:srgbClr val="333333"/>
+                </a:solidFill>
+                <a:latin typeface="Calibri" pitchFamily="34" charset="0"/>
+                <a:ea typeface="Calibri" pitchFamily="34" charset="-122"/>
+                <a:cs typeface="Calibri" pitchFamily="34" charset="-120"/>
+              </a:rPr>
+              <a:t>industry focus is on tariffs, capacity and energy; SUSSRC is only peripheral</a:t>
+            </a:r>
+            <a:endParaRPr lang="en-US" sz="1050" dirty="0"/>
+          </a:p>
+        </p:txBody>
+      </p:sp>
+      <p:sp>
+        <p:nvSpPr>
+          <p:cNvPr id="6" name="Text 4"/>
+          <p:cNvSpPr txBox="1"/>
+          <p:nvPr/>
+        </p:nvSpPr>
+        <p:spPr>
+          <a:xfrm>
+            <a:off x="3246120" y="1051560"/>
+            <a:ext cx="2651760" cy="274320"/>
+          </a:xfrm>
+          <a:prstGeom prst="rect">
+            <a:avLst/>
+          </a:prstGeom>
+          <a:noFill/>
+          <a:ln/>
+        </p:spPr>
+        <p:txBody>
+          <a:bodyPr wrap="square" lIns="0" tIns="0" rIns="0" bIns="0" rtlCol="0" anchor="ctr"/>
+          <a:lstStyle/>
+          <a:p>
+            <a:pPr marL="0" indent="0">
+              <a:buNone/>
+            </a:pPr>
+            <a:r>
+              <a:rPr lang="en-US" sz="1300" b="1" dirty="0">
+                <a:solidFill>
+                  <a:srgbClr val="000000"/>
+                </a:solidFill>
+                <a:latin typeface="Calibri" pitchFamily="34" charset="0"/>
+                <a:ea typeface="Calibri" pitchFamily="34" charset="-122"/>
+                <a:cs typeface="Calibri" pitchFamily="34" charset="-120"/>
+              </a:rPr>
+              <a:t>Unexpected results</a:t>
+            </a:r>
+            <a:endParaRPr lang="en-US" sz="1300" dirty="0"/>
+          </a:p>
+        </p:txBody>
+      </p:sp>
+      <p:sp>
+        <p:nvSpPr>
+          <p:cNvPr id="7" name="Text 5"/>
+          <p:cNvSpPr txBox="1"/>
+          <p:nvPr/>
+        </p:nvSpPr>
+        <p:spPr>
+          <a:xfrm>
+            <a:off x="3246120" y="1371600"/>
+            <a:ext cx="2651760" cy="3154680"/>
+          </a:xfrm>
+          <a:prstGeom prst="rect">
+            <a:avLst/>
+          </a:prstGeom>
+          <a:noFill/>
+          <a:ln/>
+        </p:spPr>
+        <p:txBody>
+          <a:bodyPr wrap="square" lIns="0" tIns="0" rIns="0" bIns="0" rtlCol="0" anchor="t"/>
+          <a:lstStyle/>
           <a:p>
             <a:pPr marL="139700" indent="-139700">
               <a:spcAft>
-                <a:spcPts val="1600"/>
+                <a:spcPts val="500"/>
               </a:spcAft>
               <a:buSzPct val="100000"/>
               <a:buChar char="•"/>
             </a:pPr>
             <a:r>
-              <a:rPr lang="en-US" sz="1600" b="1" dirty="0">
-                <a:solidFill>
-                  <a:srgbClr val="333333"/>
-                </a:solidFill>
-                <a:latin typeface="Calibri" pitchFamily="34" charset="0"/>
-                <a:ea typeface="Calibri" pitchFamily="34" charset="-122"/>
-                <a:cs typeface="Calibri" pitchFamily="34" charset="-120"/>
-              </a:rPr>
-              <a:t>Panel: </a:t>
-            </a:r>
-            <a:r>
-              <a:rPr lang="en-US" sz="1600" dirty="0">
-                <a:solidFill>
-                  <a:srgbClr val="333333"/>
-                </a:solidFill>
-                <a:latin typeface="Calibri" pitchFamily="34" charset="0"/>
-                <a:ea typeface="Calibri" pitchFamily="34" charset="-122"/>
-                <a:cs typeface="Calibri" pitchFamily="34" charset="-120"/>
-              </a:rPr>
-              <a:t>firm-years are not independent; conditions and outcome measured in the same year (no time lag)</a:t>
-            </a:r>
-            <a:endParaRPr lang="en-US" sz="1600" dirty="0"/>
+              <a:rPr lang="en-US" sz="1050" b="1" dirty="0">
+                <a:solidFill>
+                  <a:srgbClr val="333333"/>
+                </a:solidFill>
+                <a:latin typeface="Calibri" pitchFamily="34" charset="0"/>
+                <a:ea typeface="Calibri" pitchFamily="34" charset="-122"/>
+                <a:cs typeface="Calibri" pitchFamily="34" charset="-120"/>
+              </a:rPr>
+              <a:t>AI is not the driver: </a:t>
+            </a:r>
+            <a:r>
+              <a:rPr lang="en-US" sz="1050" dirty="0">
+                <a:solidFill>
+                  <a:srgbClr val="333333"/>
+                </a:solidFill>
+                <a:latin typeface="Calibri" pitchFamily="34" charset="0"/>
+                <a:ea typeface="Calibri" pitchFamily="34" charset="-122"/>
+                <a:cs typeface="Calibri" pitchFamily="34" charset="-120"/>
+              </a:rPr>
+              <a:t>AICAP is not necessary (0.72 pctl / 0.66 rubric) and is absent from the percentile solution</a:t>
+            </a:r>
+            <a:endParaRPr lang="en-US" sz="1050" dirty="0"/>
           </a:p>
           <a:p>
             <a:pPr marL="139700" indent="-139700">
               <a:spcAft>
-                <a:spcPts val="1600"/>
+                <a:spcPts val="500"/>
               </a:spcAft>
               <a:buSzPct val="100000"/>
               <a:buChar char="•"/>
             </a:pPr>
             <a:r>
-              <a:rPr lang="en-US" sz="1600" b="1" dirty="0">
-                <a:solidFill>
-                  <a:srgbClr val="333333"/>
-                </a:solidFill>
-                <a:latin typeface="Calibri" pitchFamily="34" charset="0"/>
-                <a:ea typeface="Calibri" pitchFamily="34" charset="-122"/>
-                <a:cs typeface="Calibri" pitchFamily="34" charset="-120"/>
-              </a:rPr>
-              <a:t>Method scope: </a:t>
-            </a:r>
-            <a:r>
-              <a:rPr lang="en-US" sz="1600" dirty="0">
-                <a:solidFill>
-                  <a:srgbClr val="333333"/>
-                </a:solidFill>
-                <a:latin typeface="Calibri" pitchFamily="34" charset="0"/>
-                <a:ea typeface="Calibri" pitchFamily="34" charset="-122"/>
-                <a:cs typeface="Calibri" pitchFamily="34" charset="-120"/>
-              </a:rPr>
-              <a:t>fsQCA identifies sufficient configurations, not causal effects or mediation</a:t>
-            </a:r>
-            <a:endParaRPr lang="en-US" sz="1600" dirty="0"/>
+              <a:rPr lang="en-US" sz="1050" b="1" dirty="0">
+                <a:solidFill>
+                  <a:srgbClr val="333333"/>
+                </a:solidFill>
+                <a:latin typeface="Calibri" pitchFamily="34" charset="0"/>
+                <a:ea typeface="Calibri" pitchFamily="34" charset="-122"/>
+                <a:cs typeface="Calibri" pitchFamily="34" charset="-120"/>
+              </a:rPr>
+              <a:t>Sustainable sourcing is not the hub: </a:t>
+            </a:r>
+            <a:r>
+              <a:rPr lang="en-US" sz="1050" dirty="0">
+                <a:solidFill>
+                  <a:srgbClr val="333333"/>
+                </a:solidFill>
+                <a:latin typeface="Calibri" pitchFamily="34" charset="0"/>
+                <a:ea typeface="Calibri" pitchFamily="34" charset="-122"/>
+                <a:cs typeface="Calibri" pitchFamily="34" charset="-120"/>
+              </a:rPr>
+              <a:t>expected to be near-necessary; actual necessity is 0.72 / 0.88 and it is only peripheral</a:t>
+            </a:r>
+            <a:endParaRPr lang="en-US" sz="1050" dirty="0"/>
+          </a:p>
+          <a:p>
+            <a:pPr marL="139700" indent="-139700">
+              <a:spcAft>
+                <a:spcPts val="500"/>
+              </a:spcAft>
+              <a:buSzPct val="100000"/>
+              <a:buChar char="•"/>
+            </a:pPr>
+            <a:r>
+              <a:rPr lang="en-US" sz="1050" b="1" dirty="0">
+                <a:solidFill>
+                  <a:srgbClr val="333333"/>
+                </a:solidFill>
+                <a:latin typeface="Calibri" pitchFamily="34" charset="0"/>
+                <a:ea typeface="Calibri" pitchFamily="34" charset="-122"/>
+                <a:cs typeface="Calibri" pitchFamily="34" charset="-120"/>
+              </a:rPr>
+              <a:t>One condition is enough: </a:t>
+            </a:r>
+            <a:r>
+              <a:rPr lang="en-US" sz="1050" dirty="0">
+                <a:solidFill>
+                  <a:srgbClr val="333333"/>
+                </a:solidFill>
+                <a:latin typeface="Calibri" pitchFamily="34" charset="0"/>
+                <a:ea typeface="Calibri" pitchFamily="34" charset="-122"/>
+                <a:cs typeface="Calibri" pitchFamily="34" charset="-120"/>
+              </a:rPr>
+              <a:t>SUPCOLL alone is sufficient (consistency 0.83 / 0.89); no single sufficient condition was expected</a:t>
+            </a:r>
+            <a:endParaRPr lang="en-US" sz="1050" dirty="0"/>
+          </a:p>
+          <a:p>
+            <a:pPr marL="139700" indent="-139700">
+              <a:spcAft>
+                <a:spcPts val="500"/>
+              </a:spcAft>
+              <a:buSzPct val="100000"/>
+              <a:buChar char="•"/>
+            </a:pPr>
+            <a:r>
+              <a:rPr lang="en-US" sz="1050" b="1" dirty="0">
+                <a:solidFill>
+                  <a:srgbClr val="333333"/>
+                </a:solidFill>
+                <a:latin typeface="Calibri" pitchFamily="34" charset="0"/>
+                <a:ea typeface="Calibri" pitchFamily="34" charset="-122"/>
+                <a:cs typeface="Calibri" pitchFamily="34" charset="-120"/>
+              </a:rPr>
+              <a:t>AI without sustainable sourcing: </a:t>
+            </a:r>
+            <a:r>
+              <a:rPr lang="en-US" sz="1050" dirty="0">
+                <a:solidFill>
+                  <a:srgbClr val="333333"/>
+                </a:solidFill>
+                <a:latin typeface="Calibri" pitchFamily="34" charset="0"/>
+                <a:ea typeface="Calibri" pitchFamily="34" charset="-122"/>
+                <a:cs typeface="Calibri" pitchFamily="34" charset="-120"/>
+              </a:rPr>
+              <a:t>AICAP*~SUSSRC appears as a rubric path, opposite to the expected direction, but it is weak (3 cases, consistency 0.79)</a:t>
+            </a:r>
+            <a:endParaRPr lang="en-US" sz="1050" dirty="0"/>
+          </a:p>
+          <a:p>
+            <a:pPr marL="139700" indent="-139700">
+              <a:spcAft>
+                <a:spcPts val="0"/>
+              </a:spcAft>
+              <a:buSzPct val="100000"/>
+              <a:buChar char="•"/>
+            </a:pPr>
+            <a:r>
+              <a:rPr lang="en-US" sz="1050" b="1" dirty="0">
+                <a:solidFill>
+                  <a:srgbClr val="333333"/>
+                </a:solidFill>
+                <a:latin typeface="Calibri" pitchFamily="34" charset="0"/>
+                <a:ea typeface="Calibri" pitchFamily="34" charset="-122"/>
+                <a:cs typeface="Calibri" pitchFamily="34" charset="-120"/>
+              </a:rPr>
+              <a:t>Less asymmetry than expected: </a:t>
+            </a:r>
+            <a:r>
+              <a:rPr lang="en-US" sz="1050" dirty="0">
+                <a:solidFill>
+                  <a:srgbClr val="333333"/>
+                </a:solidFill>
+                <a:latin typeface="Calibri" pitchFamily="34" charset="0"/>
+                <a:ea typeface="Calibri" pitchFamily="34" charset="-122"/>
+                <a:cs typeface="Calibri" pitchFamily="34" charset="-120"/>
+              </a:rPr>
+              <a:t>low resilience centres on the absence of the same condition (~SUPCOLL)</a:t>
+            </a:r>
+            <a:endParaRPr lang="en-US" sz="1050" dirty="0"/>
+          </a:p>
+        </p:txBody>
+      </p:sp>
+      <p:sp>
+        <p:nvSpPr>
+          <p:cNvPr id="8" name="Shape 6"/>
+          <p:cNvSpPr/>
+          <p:nvPr/>
+        </p:nvSpPr>
+        <p:spPr>
+          <a:xfrm>
+            <a:off x="6080760" y="1005840"/>
+            <a:ext cx="2651760" cy="3383280"/>
+          </a:xfrm>
+          <a:prstGeom prst="rect">
+            <a:avLst/>
+          </a:prstGeom>
+          <a:solidFill>
+            <a:srgbClr val="F2F2F2"/>
+          </a:solidFill>
+          <a:ln w="9525">
+            <a:solidFill>
+              <a:srgbClr val="BFBFBF"/>
+            </a:solidFill>
+            <a:prstDash val="solid"/>
+          </a:ln>
+        </p:spPr>
+      </p:sp>
+      <p:sp>
+        <p:nvSpPr>
+          <p:cNvPr id="9" name="Text 7"/>
+          <p:cNvSpPr txBox="1"/>
+          <p:nvPr/>
+        </p:nvSpPr>
+        <p:spPr>
+          <a:xfrm>
+            <a:off x="6217920" y="1051560"/>
+            <a:ext cx="2377440" cy="274320"/>
+          </a:xfrm>
+          <a:prstGeom prst="rect">
+            <a:avLst/>
+          </a:prstGeom>
+          <a:noFill/>
+          <a:ln/>
+        </p:spPr>
+        <p:txBody>
+          <a:bodyPr wrap="square" lIns="0" tIns="0" rIns="0" bIns="0" rtlCol="0" anchor="ctr"/>
+          <a:lstStyle/>
+          <a:p>
+            <a:pPr marL="0" indent="0">
+              <a:buNone/>
+            </a:pPr>
+            <a:r>
+              <a:rPr lang="en-US" sz="1300" b="1" dirty="0">
+                <a:solidFill>
+                  <a:srgbClr val="000000"/>
+                </a:solidFill>
+                <a:latin typeface="Calibri" pitchFamily="34" charset="0"/>
+                <a:ea typeface="Calibri" pitchFamily="34" charset="-122"/>
+                <a:cs typeface="Calibri" pitchFamily="34" charset="-120"/>
+              </a:rPr>
+              <a:t>Plan for Review 3</a:t>
+            </a:r>
+            <a:endParaRPr lang="en-US" sz="1300" dirty="0"/>
+          </a:p>
+        </p:txBody>
+      </p:sp>
+      <p:sp>
+        <p:nvSpPr>
+          <p:cNvPr id="10" name="Text 8"/>
+          <p:cNvSpPr txBox="1"/>
+          <p:nvPr/>
+        </p:nvSpPr>
+        <p:spPr>
+          <a:xfrm>
+            <a:off x="6217920" y="1371600"/>
+            <a:ext cx="2377440" cy="3063240"/>
+          </a:xfrm>
+          <a:prstGeom prst="rect">
+            <a:avLst/>
+          </a:prstGeom>
+          <a:noFill/>
+          <a:ln/>
+        </p:spPr>
+        <p:txBody>
+          <a:bodyPr wrap="square" lIns="0" tIns="0" rIns="0" bIns="0" rtlCol="0" anchor="t"/>
+          <a:lstStyle/>
+          <a:p>
+            <a:pPr marL="0" indent="0">
+              <a:spcAft>
+                <a:spcPts val="200"/>
+              </a:spcAft>
+              <a:buNone/>
+            </a:pPr>
+            <a:r>
+              <a:rPr lang="en-US" sz="1150" b="1" dirty="0">
+                <a:solidFill>
+                  <a:srgbClr val="000000"/>
+                </a:solidFill>
+                <a:latin typeface="Calibri" pitchFamily="34" charset="0"/>
+                <a:ea typeface="Calibri" pitchFamily="34" charset="-122"/>
+                <a:cs typeface="Calibri" pitchFamily="34" charset="-120"/>
+              </a:rPr>
+              <a:t>1.  Start writing the conference paper</a:t>
+            </a:r>
+            <a:endParaRPr lang="en-US" sz="1150" dirty="0"/>
+          </a:p>
+          <a:p>
+            <a:pPr marL="0" indent="0">
+              <a:spcAft>
+                <a:spcPts val="900"/>
+              </a:spcAft>
+              <a:buNone/>
+            </a:pPr>
+            <a:r>
+              <a:rPr lang="en-US" sz="1050" dirty="0">
+                <a:solidFill>
+                  <a:srgbClr val="333333"/>
+                </a:solidFill>
+                <a:latin typeface="Calibri" pitchFamily="34" charset="0"/>
+                <a:ea typeface="Calibri" pitchFamily="34" charset="-122"/>
+                <a:cs typeface="Calibri" pitchFamily="34" charset="-120"/>
+              </a:rPr>
+              <a:t>Full paper built on the verified fsQCA results</a:t>
+            </a:r>
+            <a:endParaRPr lang="en-US" sz="1050" dirty="0"/>
+          </a:p>
+          <a:p>
+            <a:pPr marL="0" indent="0">
+              <a:spcAft>
+                <a:spcPts val="200"/>
+              </a:spcAft>
+              <a:buNone/>
+            </a:pPr>
+            <a:r>
+              <a:rPr lang="en-US" sz="1150" b="1" dirty="0">
+                <a:solidFill>
+                  <a:srgbClr val="000000"/>
+                </a:solidFill>
+                <a:latin typeface="Calibri" pitchFamily="34" charset="0"/>
+                <a:ea typeface="Calibri" pitchFamily="34" charset="-122"/>
+                <a:cs typeface="Calibri" pitchFamily="34" charset="-120"/>
+              </a:rPr>
+              <a:t>2.  Submit it for review</a:t>
+            </a:r>
+            <a:endParaRPr lang="en-US" sz="1150" dirty="0"/>
+          </a:p>
+          <a:p>
+            <a:pPr marL="0" indent="0">
+              <a:spcAft>
+                <a:spcPts val="1100"/>
+              </a:spcAft>
+              <a:buNone/>
+            </a:pPr>
+            <a:r>
+              <a:rPr lang="en-US" sz="1050" dirty="0">
+                <a:solidFill>
+                  <a:srgbClr val="333333"/>
+                </a:solidFill>
+                <a:latin typeface="Calibri" pitchFamily="34" charset="0"/>
+                <a:ea typeface="Calibri" pitchFamily="34" charset="-122"/>
+                <a:cs typeface="Calibri" pitchFamily="34" charset="-120"/>
+              </a:rPr>
+              <a:t>Paper submitted to a conference; submission status shown at Review 3</a:t>
+            </a:r>
+            <a:endParaRPr lang="en-US" sz="1050" dirty="0"/>
+          </a:p>
+          <a:p>
+            <a:pPr marL="0" indent="0">
+              <a:spcAft>
+                <a:spcPts val="300"/>
+              </a:spcAft>
+              <a:buNone/>
+            </a:pPr>
+            <a:r>
+              <a:rPr lang="en-US" sz="1050" b="1" dirty="0">
+                <a:solidFill>
+                  <a:srgbClr val="000000"/>
+                </a:solidFill>
+                <a:latin typeface="Calibri" pitchFamily="34" charset="0"/>
+                <a:ea typeface="Calibri" pitchFamily="34" charset="-122"/>
+                <a:cs typeface="Calibri" pitchFamily="34" charset="-120"/>
+              </a:rPr>
+              <a:t>What goes into the paper</a:t>
+            </a:r>
+            <a:endParaRPr lang="en-US" sz="1050" dirty="0"/>
+          </a:p>
+          <a:p>
+            <a:pPr marL="139700" indent="-139700">
+              <a:spcAft>
+                <a:spcPts val="300"/>
+              </a:spcAft>
+              <a:buSzPct val="100000"/>
+              <a:buChar char="•"/>
+            </a:pPr>
+            <a:r>
+              <a:rPr lang="en-US" sz="1050" dirty="0">
+                <a:solidFill>
+                  <a:srgbClr val="333333"/>
+                </a:solidFill>
+                <a:latin typeface="Calibri" pitchFamily="34" charset="0"/>
+                <a:ea typeface="Calibri" pitchFamily="34" charset="-122"/>
+                <a:cs typeface="Calibri" pitchFamily="34" charset="-120"/>
+              </a:rPr>
+              <a:t>Abstract, results and discussion rewritten around the actual findings</a:t>
+            </a:r>
+            <a:endParaRPr lang="en-US" sz="1050" dirty="0"/>
+          </a:p>
+          <a:p>
+            <a:pPr marL="139700" indent="-139700">
+              <a:spcAft>
+                <a:spcPts val="300"/>
+              </a:spcAft>
+              <a:buSzPct val="100000"/>
+              <a:buChar char="•"/>
+            </a:pPr>
+            <a:r>
+              <a:rPr lang="en-US" sz="1050" dirty="0">
+                <a:solidFill>
+                  <a:srgbClr val="333333"/>
+                </a:solidFill>
+                <a:latin typeface="Calibri" pitchFamily="34" charset="0"/>
+                <a:ea typeface="Calibri" pitchFamily="34" charset="-122"/>
+                <a:cs typeface="Calibri" pitchFamily="34" charset="-120"/>
+              </a:rPr>
+              <a:t>Figures: configuration chart, XY plots, necessity chart, calibration curves</a:t>
+            </a:r>
+            <a:endParaRPr lang="en-US" sz="1050" dirty="0"/>
+          </a:p>
+          <a:p>
+            <a:pPr marL="139700" indent="-139700">
+              <a:spcAft>
+                <a:spcPts val="0"/>
+              </a:spcAft>
+              <a:buSzPct val="100000"/>
+              <a:buChar char="•"/>
+            </a:pPr>
+            <a:r>
+              <a:rPr lang="en-US" sz="1050" dirty="0">
+                <a:solidFill>
+                  <a:srgbClr val="333333"/>
+                </a:solidFill>
+                <a:latin typeface="Calibri" pitchFamily="34" charset="0"/>
+                <a:ea typeface="Calibri" pitchFamily="34" charset="-122"/>
+                <a:cs typeface="Calibri" pitchFamily="34" charset="-120"/>
+              </a:rPr>
+              <a:t>Formatted to the target conference’s template</a:t>
+            </a:r>
+            <a:endParaRPr lang="en-US" sz="1050" dirty="0"/>
+          </a:p>
+        </p:txBody>
+      </p:sp>
+      <p:sp>
+        <p:nvSpPr>
+          <p:cNvPr id="11" name="Text 9"/>
+          <p:cNvSpPr txBox="1"/>
+          <p:nvPr/>
+        </p:nvSpPr>
+        <p:spPr>
+          <a:xfrm>
+            <a:off x="411480" y="4754880"/>
+            <a:ext cx="8321040" cy="182880"/>
+          </a:xfrm>
+          <a:prstGeom prst="rect">
+            <a:avLst/>
+          </a:prstGeom>
+          <a:noFill/>
+          <a:ln/>
+        </p:spPr>
+        <p:txBody>
+          <a:bodyPr wrap="square" lIns="0" tIns="0" rIns="0" bIns="0" rtlCol="0" anchor="ctr"/>
+          <a:lstStyle/>
+          <a:p>
+            <a:pPr marL="0" indent="0">
+              <a:buNone/>
+            </a:pPr>
+            <a:endParaRPr lang="en-US" sz="800" dirty="0"/>
           </a:p>
         </p:txBody>
       </p:sp>
